--- a/first-steps-power-automate.pptx
+++ b/first-steps-power-automate.pptx
@@ -5,27 +5,28 @@
     <p:sldMasterId id="2147483648" r:id="rId1"/>
   </p:sldMasterIdLst>
   <p:notesMasterIdLst>
-    <p:notesMasterId r:id="rId10"/>
+    <p:notesMasterId r:id="rId11"/>
   </p:notesMasterIdLst>
   <p:sldIdLst>
     <p:sldId id="256" r:id="rId2"/>
-    <p:sldId id="425" r:id="rId3"/>
+    <p:sldId id="472" r:id="rId3"/>
     <p:sldId id="426" r:id="rId4"/>
     <p:sldId id="407" r:id="rId5"/>
     <p:sldId id="428" r:id="rId6"/>
     <p:sldId id="434" r:id="rId7"/>
     <p:sldId id="415" r:id="rId8"/>
-    <p:sldId id="427" r:id="rId9"/>
+    <p:sldId id="473" r:id="rId9"/>
+    <p:sldId id="427" r:id="rId10"/>
   </p:sldIdLst>
   <p:sldSz cx="18288000" cy="10287000"/>
   <p:notesSz cx="6858000" cy="9144000"/>
   <p:embeddedFontLst>
     <p:embeddedFont>
       <p:font typeface="Consolas" panose="020B0609020204030204" pitchFamily="49" charset="0"/>
-      <p:regular r:id="rId11"/>
-      <p:bold r:id="rId12"/>
-      <p:italic r:id="rId13"/>
-      <p:boldItalic r:id="rId14"/>
+      <p:regular r:id="rId12"/>
+      <p:bold r:id="rId13"/>
+      <p:italic r:id="rId14"/>
+      <p:boldItalic r:id="rId15"/>
     </p:embeddedFont>
   </p:embeddedFontLst>
   <p:defaultTextStyle>
@@ -242,7 +243,7 @@
           <a:p>
             <a:fld id="{17A98A70-FA8C-4354-959C-C70678AC9BCF}" type="datetimeFigureOut">
               <a:rPr lang="en-US" smtClean="0"/>
-              <a:t>10/18/2024</a:t>
+              <a:t>3/9/2026</a:t>
             </a:fld>
             <a:endParaRPr lang="en-US"/>
           </a:p>
@@ -1037,7 +1038,7 @@
             <a:fld id="{1D8BD707-D9CF-40AE-B4C6-C98DA3205C09}" type="datetimeFigureOut">
               <a:rPr lang="en-US" smtClean="0"/>
               <a:pPr/>
-              <a:t>10/18/2024</a:t>
+              <a:t>3/9/2026</a:t>
             </a:fld>
             <a:endParaRPr lang="en-US"/>
           </a:p>
@@ -1202,7 +1203,7 @@
             <a:fld id="{1D8BD707-D9CF-40AE-B4C6-C98DA3205C09}" type="datetimeFigureOut">
               <a:rPr lang="en-US" smtClean="0"/>
               <a:pPr/>
-              <a:t>10/18/2024</a:t>
+              <a:t>3/9/2026</a:t>
             </a:fld>
             <a:endParaRPr lang="en-US"/>
           </a:p>
@@ -1377,7 +1378,7 @@
             <a:fld id="{1D8BD707-D9CF-40AE-B4C6-C98DA3205C09}" type="datetimeFigureOut">
               <a:rPr lang="en-US" smtClean="0"/>
               <a:pPr/>
-              <a:t>10/18/2024</a:t>
+              <a:t>3/9/2026</a:t>
             </a:fld>
             <a:endParaRPr lang="en-US"/>
           </a:p>
@@ -1542,7 +1543,7 @@
             <a:fld id="{1D8BD707-D9CF-40AE-B4C6-C98DA3205C09}" type="datetimeFigureOut">
               <a:rPr lang="en-US" smtClean="0"/>
               <a:pPr/>
-              <a:t>10/18/2024</a:t>
+              <a:t>3/9/2026</a:t>
             </a:fld>
             <a:endParaRPr lang="en-US"/>
           </a:p>
@@ -1784,7 +1785,7 @@
             <a:fld id="{1D8BD707-D9CF-40AE-B4C6-C98DA3205C09}" type="datetimeFigureOut">
               <a:rPr lang="en-US" smtClean="0"/>
               <a:pPr/>
-              <a:t>10/18/2024</a:t>
+              <a:t>3/9/2026</a:t>
             </a:fld>
             <a:endParaRPr lang="en-US"/>
           </a:p>
@@ -2066,7 +2067,7 @@
             <a:fld id="{1D8BD707-D9CF-40AE-B4C6-C98DA3205C09}" type="datetimeFigureOut">
               <a:rPr lang="en-US" smtClean="0"/>
               <a:pPr/>
-              <a:t>10/18/2024</a:t>
+              <a:t>3/9/2026</a:t>
             </a:fld>
             <a:endParaRPr lang="en-US"/>
           </a:p>
@@ -2482,7 +2483,7 @@
             <a:fld id="{1D8BD707-D9CF-40AE-B4C6-C98DA3205C09}" type="datetimeFigureOut">
               <a:rPr lang="en-US" smtClean="0"/>
               <a:pPr/>
-              <a:t>10/18/2024</a:t>
+              <a:t>3/9/2026</a:t>
             </a:fld>
             <a:endParaRPr lang="en-US"/>
           </a:p>
@@ -2596,7 +2597,7 @@
             <a:fld id="{1D8BD707-D9CF-40AE-B4C6-C98DA3205C09}" type="datetimeFigureOut">
               <a:rPr lang="en-US" smtClean="0"/>
               <a:pPr/>
-              <a:t>10/18/2024</a:t>
+              <a:t>3/9/2026</a:t>
             </a:fld>
             <a:endParaRPr lang="en-US"/>
           </a:p>
@@ -2688,7 +2689,7 @@
             <a:fld id="{1D8BD707-D9CF-40AE-B4C6-C98DA3205C09}" type="datetimeFigureOut">
               <a:rPr lang="en-US" smtClean="0"/>
               <a:pPr/>
-              <a:t>10/18/2024</a:t>
+              <a:t>3/9/2026</a:t>
             </a:fld>
             <a:endParaRPr lang="en-US"/>
           </a:p>
@@ -2960,7 +2961,7 @@
             <a:fld id="{1D8BD707-D9CF-40AE-B4C6-C98DA3205C09}" type="datetimeFigureOut">
               <a:rPr lang="en-US" smtClean="0"/>
               <a:pPr/>
-              <a:t>10/18/2024</a:t>
+              <a:t>3/9/2026</a:t>
             </a:fld>
             <a:endParaRPr lang="en-US"/>
           </a:p>
@@ -3209,7 +3210,7 @@
             <a:fld id="{1D8BD707-D9CF-40AE-B4C6-C98DA3205C09}" type="datetimeFigureOut">
               <a:rPr lang="en-US" smtClean="0"/>
               <a:pPr/>
-              <a:t>10/18/2024</a:t>
+              <a:t>3/9/2026</a:t>
             </a:fld>
             <a:endParaRPr lang="en-US"/>
           </a:p>
@@ -3422,7 +3423,7 @@
             <a:fld id="{1D8BD707-D9CF-40AE-B4C6-C98DA3205C09}" type="datetimeFigureOut">
               <a:rPr lang="en-US" smtClean="0"/>
               <a:pPr/>
-              <a:t>10/18/2024</a:t>
+              <a:t>3/9/2026</a:t>
             </a:fld>
             <a:endParaRPr lang="en-US"/>
           </a:p>
@@ -3881,7 +3882,7 @@
                 </a:solidFill>
                 <a:latin typeface="Pragmatica" panose="020B0403040502020204" pitchFamily="34" charset="0"/>
               </a:rPr>
-              <a:t>First steps with Power Automate for Excel users</a:t>
+              <a:t>Power Automate for Excel: Practical Workflow Walkthroughs</a:t>
             </a:r>
           </a:p>
         </p:txBody>
@@ -4003,7 +4004,7 @@
           <a:lstStyle/>
           <a:p>
             <a:pPr algn="ctr"/>
-            <a:endParaRPr lang="en-US" sz="2700"/>
+            <a:endParaRPr lang="en-US" sz="2700" dirty="0"/>
           </a:p>
         </p:txBody>
       </p:sp>
@@ -4036,7 +4037,7 @@
                 </a:solidFill>
                 <a:latin typeface="Normafixed Tryout" panose="00000409000000000000" pitchFamily="49" charset="0"/>
               </a:rPr>
-              <a:t>Hi, I’m George</a:t>
+              <a:t>About me</a:t>
             </a:r>
           </a:p>
         </p:txBody>
@@ -4070,55 +4071,8 @@
         </p:blipFill>
         <p:spPr bwMode="auto">
           <a:xfrm>
-            <a:off x="14077075" y="195640"/>
+            <a:off x="13638675" y="195638"/>
             <a:ext cx="3130385" cy="4088666"/>
-          </a:xfrm>
-          <a:prstGeom prst="rect">
-            <a:avLst/>
-          </a:prstGeom>
-          <a:noFill/>
-          <a:extLst>
-            <a:ext uri="{909E8E84-426E-40DD-AFC4-6F175D3DCCD1}">
-              <a14:hiddenFill xmlns:a14="http://schemas.microsoft.com/office/drawing/2010/main">
-                <a:solidFill>
-                  <a:srgbClr val="FFFFFF"/>
-                </a:solidFill>
-              </a14:hiddenFill>
-            </a:ext>
-          </a:extLst>
-        </p:spPr>
-      </p:pic>
-      <p:pic>
-        <p:nvPicPr>
-          <p:cNvPr id="6" name="Picture 6" descr="Free photos of Cleveland">
-            <a:extLst>
-              <a:ext uri="{FF2B5EF4-FFF2-40B4-BE49-F238E27FC236}">
-                <a16:creationId xmlns:a16="http://schemas.microsoft.com/office/drawing/2014/main" id="{CBA53EEE-E3E1-D99E-A4DC-1C4DD2E6CE4A}"/>
-              </a:ext>
-            </a:extLst>
-          </p:cNvPr>
-          <p:cNvPicPr>
-            <a:picLocks noChangeAspect="1" noChangeArrowheads="1"/>
-          </p:cNvPicPr>
-          <p:nvPr/>
-        </p:nvPicPr>
-        <p:blipFill>
-          <a:blip r:embed="rId3" cstate="print">
-            <a:extLst>
-              <a:ext uri="{28A0092B-C50C-407E-A947-70E740481C1C}">
-                <a14:useLocalDpi xmlns:a14="http://schemas.microsoft.com/office/drawing/2010/main" val="0"/>
-              </a:ext>
-            </a:extLst>
-          </a:blip>
-          <a:srcRect/>
-          <a:stretch>
-            <a:fillRect/>
-          </a:stretch>
-        </p:blipFill>
-        <p:spPr bwMode="auto">
-          <a:xfrm>
-            <a:off x="1695692" y="2968810"/>
-            <a:ext cx="5535359" cy="3684473"/>
           </a:xfrm>
           <a:prstGeom prst="rect">
             <a:avLst/>
@@ -4150,7 +4104,7 @@
           <p:nvPr/>
         </p:nvPicPr>
         <p:blipFill>
-          <a:blip r:embed="rId4" cstate="print">
+          <a:blip r:embed="rId3" cstate="print">
             <a:extLst>
               <a:ext uri="{28A0092B-C50C-407E-A947-70E740481C1C}">
                 <a14:useLocalDpi xmlns:a14="http://schemas.microsoft.com/office/drawing/2010/main" val="0"/>
@@ -4186,7 +4140,7 @@
           <p:nvPr/>
         </p:nvPicPr>
         <p:blipFill>
-          <a:blip r:embed="rId5">
+          <a:blip r:embed="rId4">
             <a:extLst>
               <a:ext uri="{28A0092B-C50C-407E-A947-70E740481C1C}">
                 <a14:useLocalDpi xmlns:a14="http://schemas.microsoft.com/office/drawing/2010/main" val="0"/>
@@ -4200,7 +4154,7 @@
         </p:blipFill>
         <p:spPr bwMode="auto">
           <a:xfrm>
-            <a:off x="10321136" y="2210054"/>
+            <a:off x="9498829" y="1736915"/>
             <a:ext cx="3437261" cy="4507995"/>
           </a:xfrm>
           <a:prstGeom prst="rect">
@@ -4233,7 +4187,7 @@
           <p:nvPr/>
         </p:nvPicPr>
         <p:blipFill>
-          <a:blip r:embed="rId6">
+          <a:blip r:embed="rId5">
             <a:extLst>
               <a:ext uri="{28A0092B-C50C-407E-A947-70E740481C1C}">
                 <a14:useLocalDpi xmlns:a14="http://schemas.microsoft.com/office/drawing/2010/main" val="0"/>
@@ -4265,10 +4219,119 @@
           </a:extLst>
         </p:spPr>
       </p:pic>
+      <p:pic>
+        <p:nvPicPr>
+          <p:cNvPr id="2" name="Picture 1" descr="Global Excel Summit (9-11 February 2022) - Microsoft Excel Conference">
+            <a:extLst>
+              <a:ext uri="{FF2B5EF4-FFF2-40B4-BE49-F238E27FC236}">
+                <a16:creationId xmlns:a16="http://schemas.microsoft.com/office/drawing/2014/main" id="{A4A37758-F92B-49D0-9144-77DE1A40AF22}"/>
+              </a:ext>
+            </a:extLst>
+          </p:cNvPr>
+          <p:cNvPicPr>
+            <a:picLocks noChangeAspect="1"/>
+          </p:cNvPicPr>
+          <p:nvPr/>
+        </p:nvPicPr>
+        <p:blipFill>
+          <a:blip r:embed="rId6"/>
+          <a:stretch>
+            <a:fillRect/>
+          </a:stretch>
+        </p:blipFill>
+        <p:spPr>
+          <a:xfrm>
+            <a:off x="14397664" y="4795613"/>
+            <a:ext cx="2901909" cy="2901909"/>
+          </a:xfrm>
+          <a:prstGeom prst="rect">
+            <a:avLst/>
+          </a:prstGeom>
+        </p:spPr>
+      </p:pic>
+      <p:pic>
+        <p:nvPicPr>
+          <p:cNvPr id="7" name="Picture 6" descr="linkedinlearninginstructor #linkedinlearning | Thais Cooke | 80 comments">
+            <a:extLst>
+              <a:ext uri="{FF2B5EF4-FFF2-40B4-BE49-F238E27FC236}">
+                <a16:creationId xmlns:a16="http://schemas.microsoft.com/office/drawing/2014/main" id="{C1E81082-DC04-E8C8-AF35-69591438D97C}"/>
+              </a:ext>
+            </a:extLst>
+          </p:cNvPr>
+          <p:cNvPicPr>
+            <a:picLocks noChangeAspect="1"/>
+          </p:cNvPicPr>
+          <p:nvPr/>
+        </p:nvPicPr>
+        <p:blipFill>
+          <a:blip r:embed="rId7"/>
+          <a:stretch>
+            <a:fillRect/>
+          </a:stretch>
+        </p:blipFill>
+        <p:spPr>
+          <a:xfrm>
+            <a:off x="2933407" y="4935896"/>
+            <a:ext cx="5185833" cy="2133600"/>
+          </a:xfrm>
+          <a:prstGeom prst="rect">
+            <a:avLst/>
+          </a:prstGeom>
+        </p:spPr>
+      </p:pic>
+      <p:sp>
+        <p:nvSpPr>
+          <p:cNvPr id="9" name="TextBox 8">
+            <a:extLst>
+              <a:ext uri="{FF2B5EF4-FFF2-40B4-BE49-F238E27FC236}">
+                <a16:creationId xmlns:a16="http://schemas.microsoft.com/office/drawing/2014/main" id="{A4DDDC47-548D-1287-3489-8B5D9DA3C477}"/>
+              </a:ext>
+            </a:extLst>
+          </p:cNvPr>
+          <p:cNvSpPr txBox="1"/>
+          <p:nvPr/>
+        </p:nvSpPr>
+        <p:spPr>
+          <a:xfrm>
+            <a:off x="849234" y="2485315"/>
+            <a:ext cx="6618366" cy="1754326"/>
+          </a:xfrm>
+          <a:prstGeom prst="rect">
+            <a:avLst/>
+          </a:prstGeom>
+          <a:noFill/>
+        </p:spPr>
+        <p:txBody>
+          <a:bodyPr wrap="square" rtlCol="0">
+            <a:spAutoFit/>
+          </a:bodyPr>
+          <a:lstStyle/>
+          <a:p>
+            <a:r>
+              <a:rPr lang="en-US" sz="3600" b="1" dirty="0">
+                <a:solidFill>
+                  <a:schemeClr val="bg1"/>
+                </a:solidFill>
+              </a:rPr>
+              <a:t>I help Excel users move from fragile spreadsheets</a:t>
+            </a:r>
+          </a:p>
+          <a:p>
+            <a:r>
+              <a:rPr lang="en-US" sz="3600" b="1" dirty="0">
+                <a:solidFill>
+                  <a:schemeClr val="bg1"/>
+                </a:solidFill>
+              </a:rPr>
+              <a:t>to confident, scalable analysis.</a:t>
+            </a:r>
+          </a:p>
+        </p:txBody>
+      </p:sp>
     </p:spTree>
     <p:extLst>
       <p:ext uri="{BB962C8B-B14F-4D97-AF65-F5344CB8AC3E}">
-        <p14:creationId xmlns:p14="http://schemas.microsoft.com/office/powerpoint/2010/main" val="1872901171"/>
+        <p14:creationId xmlns:p14="http://schemas.microsoft.com/office/powerpoint/2010/main" val="612351153"/>
       </p:ext>
     </p:extLst>
   </p:cSld>
@@ -5410,6 +5473,241 @@
 </file>
 
 <file path=ppt/slides/slide8.xml><?xml version="1.0" encoding="utf-8"?>
+<p:sld xmlns:a="http://schemas.openxmlformats.org/drawingml/2006/main" xmlns:r="http://schemas.openxmlformats.org/officeDocument/2006/relationships" xmlns:p="http://schemas.openxmlformats.org/presentationml/2006/main">
+  <p:cSld>
+    <p:spTree>
+      <p:nvGrpSpPr>
+        <p:cNvPr id="1" name="">
+          <a:extLst>
+            <a:ext uri="{FF2B5EF4-FFF2-40B4-BE49-F238E27FC236}">
+              <a16:creationId xmlns:a16="http://schemas.microsoft.com/office/drawing/2014/main" id="{BDA5AF1E-B534-ED60-A209-D45F685A7390}"/>
+            </a:ext>
+          </a:extLst>
+        </p:cNvPr>
+        <p:cNvGrpSpPr/>
+        <p:nvPr/>
+      </p:nvGrpSpPr>
+      <p:grpSpPr>
+        <a:xfrm>
+          <a:off x="0" y="0"/>
+          <a:ext cx="0" cy="0"/>
+          <a:chOff x="0" y="0"/>
+          <a:chExt cx="0" cy="0"/>
+        </a:xfrm>
+      </p:grpSpPr>
+      <p:sp>
+        <p:nvSpPr>
+          <p:cNvPr id="11" name="TextBox 10">
+            <a:extLst>
+              <a:ext uri="{FF2B5EF4-FFF2-40B4-BE49-F238E27FC236}">
+                <a16:creationId xmlns:a16="http://schemas.microsoft.com/office/drawing/2014/main" id="{7D241B68-521F-8675-8CC5-582FD7BAE846}"/>
+              </a:ext>
+            </a:extLst>
+          </p:cNvPr>
+          <p:cNvSpPr txBox="1"/>
+          <p:nvPr/>
+        </p:nvSpPr>
+        <p:spPr>
+          <a:xfrm>
+            <a:off x="520861" y="170082"/>
+            <a:ext cx="11979797" cy="1477328"/>
+          </a:xfrm>
+          <a:prstGeom prst="rect">
+            <a:avLst/>
+          </a:prstGeom>
+          <a:noFill/>
+        </p:spPr>
+        <p:txBody>
+          <a:bodyPr wrap="square" rtlCol="0">
+            <a:spAutoFit/>
+          </a:bodyPr>
+          <a:lstStyle/>
+          <a:p>
+            <a:r>
+              <a:rPr lang="en-US" sz="9000" dirty="0">
+                <a:latin typeface="Aliens &amp; cows" panose="00000500000000000000" pitchFamily="2" charset="0"/>
+              </a:rPr>
+              <a:t>Next steps</a:t>
+            </a:r>
+          </a:p>
+        </p:txBody>
+      </p:sp>
+      <p:sp>
+        <p:nvSpPr>
+          <p:cNvPr id="3" name="TextBox 2">
+            <a:extLst>
+              <a:ext uri="{FF2B5EF4-FFF2-40B4-BE49-F238E27FC236}">
+                <a16:creationId xmlns:a16="http://schemas.microsoft.com/office/drawing/2014/main" id="{E00DA09E-07D8-E03F-9795-0758159FB25B}"/>
+              </a:ext>
+            </a:extLst>
+          </p:cNvPr>
+          <p:cNvSpPr txBox="1"/>
+          <p:nvPr/>
+        </p:nvSpPr>
+        <p:spPr>
+          <a:xfrm>
+            <a:off x="520861" y="3191948"/>
+            <a:ext cx="14393120" cy="3970318"/>
+          </a:xfrm>
+          <a:prstGeom prst="rect">
+            <a:avLst/>
+          </a:prstGeom>
+          <a:noFill/>
+        </p:spPr>
+        <p:txBody>
+          <a:bodyPr wrap="square" rtlCol="0">
+            <a:spAutoFit/>
+          </a:bodyPr>
+          <a:lstStyle/>
+          <a:p>
+            <a:pPr marL="685800" indent="-685800">
+              <a:buClr>
+                <a:srgbClr val="CF3338"/>
+              </a:buClr>
+              <a:buFont typeface="Arial" panose="020B0604020202020204" pitchFamily="34" charset="0"/>
+              <a:buChar char="•"/>
+            </a:pPr>
+            <a:r>
+              <a:rPr lang="en-US" sz="4200" dirty="0">
+                <a:solidFill>
+                  <a:srgbClr val="707070"/>
+                </a:solidFill>
+                <a:latin typeface="Pragmatica" panose="020B0403040502020204" pitchFamily="34" charset="0"/>
+              </a:rPr>
+              <a:t>Example files and resources will stay up at link</a:t>
+            </a:r>
+          </a:p>
+          <a:p>
+            <a:pPr marL="685800" indent="-685800">
+              <a:buClr>
+                <a:srgbClr val="CF3338"/>
+              </a:buClr>
+              <a:buFont typeface="Arial" panose="020B0604020202020204" pitchFamily="34" charset="0"/>
+              <a:buChar char="•"/>
+            </a:pPr>
+            <a:r>
+              <a:rPr lang="en-US" sz="4200" dirty="0">
+                <a:solidFill>
+                  <a:srgbClr val="707070"/>
+                </a:solidFill>
+                <a:latin typeface="Pragmatica" panose="020B0403040502020204" pitchFamily="34" charset="0"/>
+              </a:rPr>
+              <a:t>A recording will be available after the event inside the membership: </a:t>
+            </a:r>
+            <a:r>
+              <a:rPr lang="en-US" sz="4200" dirty="0">
+                <a:solidFill>
+                  <a:srgbClr val="CF3338"/>
+                </a:solidFill>
+                <a:latin typeface="Pragmatica" panose="020B0403040502020204" pitchFamily="34" charset="0"/>
+                <a:hlinkClick r:id="rId2">
+                  <a:extLst>
+                    <a:ext uri="{A12FA001-AC4F-418D-AE19-62706E023703}">
+                      <ahyp:hlinkClr xmlns:ahyp="http://schemas.microsoft.com/office/drawing/2018/hyperlinkcolor" val="tx"/>
+                    </a:ext>
+                  </a:extLst>
+                </a:hlinkClick>
+              </a:rPr>
+              <a:t>https://stringfestdata.gumroad.com/l/mxlais?layout=profile</a:t>
+            </a:r>
+            <a:r>
+              <a:rPr lang="en-US" sz="4200" dirty="0">
+                <a:solidFill>
+                  <a:srgbClr val="CF3338"/>
+                </a:solidFill>
+                <a:latin typeface="Pragmatica" panose="020B0403040502020204" pitchFamily="34" charset="0"/>
+              </a:rPr>
+              <a:t> </a:t>
+            </a:r>
+          </a:p>
+          <a:p>
+            <a:pPr marL="1143000" lvl="1" indent="-685800">
+              <a:buClr>
+                <a:srgbClr val="CF3338"/>
+              </a:buClr>
+              <a:buFont typeface="Arial" panose="020B0604020202020204" pitchFamily="34" charset="0"/>
+              <a:buChar char="•"/>
+            </a:pPr>
+            <a:r>
+              <a:rPr lang="en-US" sz="4200" dirty="0">
+                <a:solidFill>
+                  <a:srgbClr val="707070"/>
+                </a:solidFill>
+                <a:latin typeface="Pragmatica" panose="020B0403040502020204" pitchFamily="34" charset="0"/>
+              </a:rPr>
+              <a:t>First week free</a:t>
+            </a:r>
+          </a:p>
+          <a:p>
+            <a:pPr marL="1143000" lvl="1" indent="-685800">
+              <a:buClr>
+                <a:srgbClr val="CF3338"/>
+              </a:buClr>
+              <a:buFont typeface="Arial" panose="020B0604020202020204" pitchFamily="34" charset="0"/>
+              <a:buChar char="•"/>
+            </a:pPr>
+            <a:r>
+              <a:rPr lang="en-US" sz="4200" dirty="0">
+                <a:solidFill>
+                  <a:srgbClr val="707070"/>
+                </a:solidFill>
+                <a:latin typeface="Pragmatica" panose="020B0403040502020204" pitchFamily="34" charset="0"/>
+              </a:rPr>
+              <a:t>First month for $1 with email promocode</a:t>
+            </a:r>
+          </a:p>
+        </p:txBody>
+      </p:sp>
+      <p:pic>
+        <p:nvPicPr>
+          <p:cNvPr id="15" name="Picture 14" descr="A close up of a sign&#10;&#10;Description automatically generated">
+            <a:extLst>
+              <a:ext uri="{FF2B5EF4-FFF2-40B4-BE49-F238E27FC236}">
+                <a16:creationId xmlns:a16="http://schemas.microsoft.com/office/drawing/2014/main" id="{6AB4293D-85CC-94D1-D765-0CF498C9EE06}"/>
+              </a:ext>
+            </a:extLst>
+          </p:cNvPr>
+          <p:cNvPicPr>
+            <a:picLocks noChangeAspect="1"/>
+          </p:cNvPicPr>
+          <p:nvPr/>
+        </p:nvPicPr>
+        <p:blipFill>
+          <a:blip r:embed="rId3">
+            <a:extLst>
+              <a:ext uri="{28A0092B-C50C-407E-A947-70E740481C1C}">
+                <a14:useLocalDpi xmlns:a14="http://schemas.microsoft.com/office/drawing/2010/main" val="0"/>
+              </a:ext>
+            </a:extLst>
+          </a:blip>
+          <a:stretch>
+            <a:fillRect/>
+          </a:stretch>
+        </p:blipFill>
+        <p:spPr>
+          <a:xfrm>
+            <a:off x="16341036" y="8058429"/>
+            <a:ext cx="1942857" cy="2228571"/>
+          </a:xfrm>
+          <a:prstGeom prst="rect">
+            <a:avLst/>
+          </a:prstGeom>
+        </p:spPr>
+      </p:pic>
+    </p:spTree>
+    <p:extLst>
+      <p:ext uri="{BB962C8B-B14F-4D97-AF65-F5344CB8AC3E}">
+        <p14:creationId xmlns:p14="http://schemas.microsoft.com/office/powerpoint/2010/main" val="2589703891"/>
+      </p:ext>
+    </p:extLst>
+  </p:cSld>
+  <p:clrMapOvr>
+    <a:masterClrMapping/>
+  </p:clrMapOvr>
+</p:sld>
+</file>
+
+<file path=ppt/slides/slide9.xml><?xml version="1.0" encoding="utf-8"?>
 <p:sld xmlns:a="http://schemas.openxmlformats.org/drawingml/2006/main" xmlns:r="http://schemas.openxmlformats.org/officeDocument/2006/relationships" xmlns:p="http://schemas.openxmlformats.org/presentationml/2006/main">
   <p:cSld>
     <p:spTree>
